--- a/docs/BreatheTwin_presentation.pptx
+++ b/docs/BreatheTwin_presentation.pptx
@@ -5652,7 +5652,7 @@
       </p:sp>
       <p:sp>
         <p:nvSpPr>
-          <p:cNvPr id="9" name="Avatar Yash Saxena"/>
+          <p:cNvPr id="9" name="Avatar Anushka Tomar"/>
           <p:cNvSpPr/>
           <p:nvPr/>
         </p:nvSpPr>
@@ -5700,21 +5700,21 @@
                 </a:solidFill>
                 <a:latin typeface="Times New Roman"/>
               </a:rPr>
-              <a:t>YS</a:t>
-            </a:r>
-          </a:p>
-        </p:txBody>
-      </p:sp>
-      <p:sp>
-        <p:nvSpPr>
-          <p:cNvPr id="10" name="Name Yash Saxena"/>
+              <a:t>AT</a:t>
+            </a:r>
+          </a:p>
+        </p:txBody>
+      </p:sp>
+      <p:sp>
+        <p:nvSpPr>
+          <p:cNvPr id="10" name="Name Anushka Tomar"/>
           <p:cNvSpPr txBox="1"/>
           <p:nvPr/>
         </p:nvSpPr>
         <p:spPr>
           <a:xfrm>
             <a:off x="3886200" y="5212080"/>
-            <a:ext cx="2331720" cy="365760"/>
+            <a:ext cx="2331720" cy="640080"/>
           </a:xfrm>
           <a:prstGeom prst="rect">
             <a:avLst/>
@@ -5729,7 +5729,7 @@
           <a:p>
             <a:pPr algn="ctr">
               <a:spcAft>
-                <a:spcPts val="300"/>
+                <a:spcPts val="0"/>
               </a:spcAft>
               <a:buNone/>
             </a:pPr>
@@ -5740,14 +5740,31 @@
                 </a:solidFill>
                 <a:latin typeface="Times New Roman"/>
               </a:rPr>
-              <a:t>Yash Saxena</a:t>
-            </a:r>
-          </a:p>
-        </p:txBody>
-      </p:sp>
-      <p:sp>
-        <p:nvSpPr>
-          <p:cNvPr id="11" name="Avatar Anushka Tomar"/>
+              <a:t>Anushka Tomar</a:t>
+            </a:r>
+          </a:p>
+          <a:p>
+            <a:pPr algn="ctr">
+              <a:spcAft>
+                <a:spcPts val="0"/>
+              </a:spcAft>
+              <a:buNone/>
+            </a:pPr>
+            <a:r>
+              <a:rPr sz="1800" b="0" i="1">
+                <a:solidFill>
+                  <a:srgbClr val="111111"/>
+                </a:solidFill>
+                <a:latin typeface="Times New Roman"/>
+              </a:rPr>
+              <a:t>Team leader</a:t>
+            </a:r>
+          </a:p>
+        </p:txBody>
+      </p:sp>
+      <p:sp>
+        <p:nvSpPr>
+          <p:cNvPr id="11" name="Avatar Yash Saxena"/>
           <p:cNvSpPr/>
           <p:nvPr/>
         </p:nvSpPr>
@@ -5795,21 +5812,21 @@
                 </a:solidFill>
                 <a:latin typeface="Times New Roman"/>
               </a:rPr>
-              <a:t>AT</a:t>
-            </a:r>
-          </a:p>
-        </p:txBody>
-      </p:sp>
-      <p:sp>
-        <p:nvSpPr>
-          <p:cNvPr id="12" name="Name Anushka Tomar"/>
+              <a:t>YS</a:t>
+            </a:r>
+          </a:p>
+        </p:txBody>
+      </p:sp>
+      <p:sp>
+        <p:nvSpPr>
+          <p:cNvPr id="12" name="Name Yash Saxena"/>
           <p:cNvSpPr txBox="1"/>
           <p:nvPr/>
         </p:nvSpPr>
         <p:spPr>
           <a:xfrm>
             <a:off x="6172200" y="5212080"/>
-            <a:ext cx="2331720" cy="365760"/>
+            <a:ext cx="2331720" cy="640080"/>
           </a:xfrm>
           <a:prstGeom prst="rect">
             <a:avLst/>
@@ -5824,7 +5841,7 @@
           <a:p>
             <a:pPr algn="ctr">
               <a:spcAft>
-                <a:spcPts val="300"/>
+                <a:spcPts val="0"/>
               </a:spcAft>
               <a:buNone/>
             </a:pPr>
@@ -5835,7 +5852,7 @@
                 </a:solidFill>
                 <a:latin typeface="Times New Roman"/>
               </a:rPr>
-              <a:t>Anushka Tomar</a:t>
+              <a:t>Yash Saxena</a:t>
             </a:r>
           </a:p>
         </p:txBody>
@@ -11216,7 +11233,7 @@
                 </a:solidFill>
                 <a:latin typeface="Times New Roman"/>
               </a:rPr>
-              <a:t>Yash Saxena · Anushka Tomar</a:t>
+              <a:t>Anushka Tomar (Team leader) · Yash Saxena</a:t>
             </a:r>
           </a:p>
           <a:p>

--- a/docs/BreatheTwin_presentation.pptx
+++ b/docs/BreatheTwin_presentation.pptx
@@ -9419,7 +9419,7 @@
                 </a:solidFill>
                 <a:latin typeface="Times New Roman"/>
               </a:rPr>
-              <a:t>To fix: </a:t>
+              <a:t>Fixed: </a:t>
             </a:r>
             <a:r>
               <a:rPr sz="1150">
@@ -9428,7 +9428,7 @@
                 </a:solidFill>
                 <a:latin typeface="Times New Roman"/>
               </a:rPr>
-              <a:t>an SpO2 drop alone barely moves the learned risk (the rule layer still flags it urgent).</a:t>
+              <a:t>oxygen at 82% scored Low, so a safety override now makes any reading below 90% Urgent.</a:t>
             </a:r>
           </a:p>
           <a:p>

--- a/docs/BreatheTwin_presentation.pptx
+++ b/docs/BreatheTwin_presentation.pptx
@@ -438,25 +438,28 @@
           </c:spPr>
           <c:cat>
             <c:strRef>
-              <c:f>Sheet1!$A$2:$A$7</c:f>
+              <c:f>Sheet1!$A$2:$A$8</c:f>
               <c:strCache>
-                <c:ptCount val="6"/>
+                <c:ptCount val="7"/>
                 <c:pt idx="0">
+                  <c:v>22-29</c:v>
+                </c:pt>
+                <c:pt idx="1">
                   <c:v>30-39</c:v>
                 </c:pt>
-                <c:pt idx="1">
+                <c:pt idx="2">
                   <c:v>40-49</c:v>
                 </c:pt>
-                <c:pt idx="2">
+                <c:pt idx="3">
                   <c:v>50-59</c:v>
                 </c:pt>
-                <c:pt idx="3">
+                <c:pt idx="4">
                   <c:v>60-69</c:v>
                 </c:pt>
-                <c:pt idx="4">
+                <c:pt idx="5">
                   <c:v>70-79</c:v>
                 </c:pt>
-                <c:pt idx="5">
+                <c:pt idx="6">
                   <c:v>80+</c:v>
                 </c:pt>
               </c:strCache>
@@ -464,26 +467,29 @@
           </c:cat>
           <c:val>
             <c:numRef>
-              <c:f>Sheet1!$B$2:$B$7</c:f>
+              <c:f>Sheet1!$B$2:$B$8</c:f>
               <c:numCache>
                 <c:formatCode>General</c:formatCode>
-                <c:ptCount val="6"/>
+                <c:ptCount val="7"/>
                 <c:pt idx="0">
+                  <c:v>20</c:v>
+                </c:pt>
+                <c:pt idx="1">
                   <c:v>40</c:v>
                 </c:pt>
-                <c:pt idx="1">
+                <c:pt idx="2">
                   <c:v>49</c:v>
                 </c:pt>
-                <c:pt idx="2">
+                <c:pt idx="3">
                   <c:v>62</c:v>
                 </c:pt>
-                <c:pt idx="3">
+                <c:pt idx="4">
                   <c:v>67</c:v>
                 </c:pt>
-                <c:pt idx="4">
+                <c:pt idx="5">
                   <c:v>79</c:v>
                 </c:pt>
-                <c:pt idx="5">
+                <c:pt idx="6">
                   <c:v>103</c:v>
                 </c:pt>
               </c:numCache>
@@ -701,19 +707,19 @@
                 <c:formatCode>General</c:formatCode>
                 <c:ptCount val="5"/>
                 <c:pt idx="0">
-                  <c:v>0.659</c:v>
+                  <c:v>0.593</c:v>
                 </c:pt>
                 <c:pt idx="1">
-                  <c:v>0.452</c:v>
+                  <c:v>0.566</c:v>
                 </c:pt>
                 <c:pt idx="2">
-                  <c:v>0.791</c:v>
+                  <c:v>0.818</c:v>
                 </c:pt>
                 <c:pt idx="3">
-                  <c:v>0.805</c:v>
+                  <c:v>0.818</c:v>
                 </c:pt>
                 <c:pt idx="4">
-                  <c:v>0.8</c:v>
+                  <c:v>0.815</c:v>
                 </c:pt>
               </c:numCache>
             </c:numRef>
@@ -901,16 +907,16 @@
                   <c:v>Health record</c:v>
                 </c:pt>
                 <c:pt idx="1">
-                  <c:v>Blood oxygen</c:v>
+                  <c:v>Breathing rate</c:v>
                 </c:pt>
                 <c:pt idx="2">
-                  <c:v>Breathing rate</c:v>
+                  <c:v>Rescue inhaler use</c:v>
                 </c:pt>
                 <c:pt idx="3">
-                  <c:v>Rescue inhaler use</c:v>
+                  <c:v>Heart rate</c:v>
                 </c:pt>
                 <c:pt idx="4">
-                  <c:v>Heart rate</c:v>
+                  <c:v>Blood oxygen</c:v>
                 </c:pt>
                 <c:pt idx="5">
                   <c:v>Cold snap</c:v>
@@ -919,7 +925,7 @@
                   <c:v>Activity</c:v>
                 </c:pt>
                 <c:pt idx="7">
-                  <c:v>Missed inhaler doses</c:v>
+                  <c:v>Air pollution</c:v>
                 </c:pt>
               </c:strCache>
             </c:strRef>
@@ -931,28 +937,28 @@
                 <c:formatCode>General</c:formatCode>
                 <c:ptCount val="8"/>
                 <c:pt idx="0">
-                  <c:v>32.1</c:v>
+                  <c:v>39.5</c:v>
                 </c:pt>
                 <c:pt idx="1">
-                  <c:v>14.5</c:v>
+                  <c:v>12.5</c:v>
                 </c:pt>
                 <c:pt idx="2">
-                  <c:v>12.4</c:v>
+                  <c:v>10.7</c:v>
                 </c:pt>
                 <c:pt idx="3">
-                  <c:v>10.7</c:v>
+                  <c:v>9.8</c:v>
                 </c:pt>
                 <c:pt idx="4">
-                  <c:v>9.9</c:v>
+                  <c:v>9.3</c:v>
                 </c:pt>
                 <c:pt idx="5">
-                  <c:v>6.3</c:v>
+                  <c:v>7.6</c:v>
                 </c:pt>
                 <c:pt idx="6">
-                  <c:v>5.4</c:v>
+                  <c:v>3.9</c:v>
                 </c:pt>
                 <c:pt idx="7">
-                  <c:v>2.7</c:v>
+                  <c:v>2.3</c:v>
                 </c:pt>
               </c:numCache>
             </c:numRef>
@@ -6533,7 +6539,7 @@
                 </a:solidFill>
                 <a:latin typeface="Times New Roman"/>
               </a:rPr>
-              <a:t>0.80</a:t>
+              <a:t>0.815</a:t>
             </a:r>
           </a:p>
           <a:p>
@@ -6612,7 +6618,7 @@
                 </a:solidFill>
                 <a:latin typeface="Times New Roman"/>
               </a:rPr>
-              <a:t>66%</a:t>
+              <a:t>67%</a:t>
             </a:r>
           </a:p>
           <a:p>
@@ -6691,7 +6697,7 @@
                 </a:solidFill>
                 <a:latin typeface="Times New Roman"/>
               </a:rPr>
-              <a:t>0.8</a:t>
+              <a:t>0.91</a:t>
             </a:r>
           </a:p>
           <a:p>
@@ -6770,7 +6776,7 @@
                 </a:solidFill>
                 <a:latin typeface="Times New Roman"/>
               </a:rPr>
-              <a:t>120</a:t>
+              <a:t>126</a:t>
             </a:r>
           </a:p>
           <a:p>
@@ -7452,7 +7458,7 @@
                 </a:solidFill>
                 <a:latin typeface="Times New Roman"/>
               </a:rPr>
-              <a:t>0.71</a:t>
+              <a:t>0.73</a:t>
             </a:r>
           </a:p>
           <a:p>
@@ -8130,7 +8136,7 @@
                           </a:solidFill>
                           <a:latin typeface="Times New Roman"/>
                         </a:rPr>
-                        <a:t>19%</a:t>
+                        <a:t>23%</a:t>
                       </a:r>
                     </a:p>
                   </a:txBody>
@@ -8261,7 +8267,7 @@
                           </a:solidFill>
                           <a:latin typeface="Times New Roman"/>
                         </a:rPr>
-                        <a:t>20.2%</a:t>
+                        <a:t>15.6%</a:t>
                       </a:r>
                     </a:p>
                   </a:txBody>
@@ -8435,7 +8441,7 @@
                           </a:solidFill>
                           <a:latin typeface="Times New Roman"/>
                         </a:rPr>
-                        <a:t>0.6%</a:t>
+                        <a:t>0.9%</a:t>
                       </a:r>
                     </a:p>
                   </a:txBody>
@@ -8478,7 +8484,7 @@
                           </a:solidFill>
                           <a:latin typeface="Times New Roman"/>
                         </a:rPr>
-                        <a:t>17%</a:t>
+                        <a:t>33%</a:t>
                       </a:r>
                     </a:p>
                   </a:txBody>
@@ -8609,7 +8615,7 @@
                           </a:solidFill>
                           <a:latin typeface="Times New Roman"/>
                         </a:rPr>
-                        <a:t>0.6%</a:t>
+                        <a:t>0.9%</a:t>
                       </a:r>
                     </a:p>
                   </a:txBody>
@@ -8826,7 +8832,7 @@
                           </a:solidFill>
                           <a:latin typeface="Times New Roman"/>
                         </a:rPr>
-                        <a:t>0%</a:t>
+                        <a:t>11%</a:t>
                       </a:r>
                     </a:p>
                   </a:txBody>
@@ -8957,7 +8963,7 @@
                           </a:solidFill>
                           <a:latin typeface="Times New Roman"/>
                         </a:rPr>
-                        <a:t>0.6%</a:t>
+                        <a:t>0.5%</a:t>
                       </a:r>
                     </a:p>
                   </a:txBody>
@@ -9000,7 +9006,7 @@
                           </a:solidFill>
                           <a:latin typeface="Times New Roman"/>
                         </a:rPr>
-                        <a:t>22%</a:t>
+                        <a:t>17%</a:t>
                       </a:r>
                     </a:p>
                   </a:txBody>
@@ -9174,7 +9180,7 @@
                           </a:solidFill>
                           <a:latin typeface="Times New Roman"/>
                         </a:rPr>
-                        <a:t>31%</a:t>
+                        <a:t>34%</a:t>
                       </a:r>
                     </a:p>
                   </a:txBody>
@@ -9378,7 +9384,7 @@
                 </a:solidFill>
                 <a:latin typeface="Times New Roman"/>
               </a:rPr>
-              <a:t>breathing up to 35/min gives High risk; all three signs worse gives 96%.</a:t>
+              <a:t>breathing up to 35/min gives High risk; all three signs worse gives 97%.</a:t>
             </a:r>
           </a:p>
           <a:p>
@@ -9453,7 +9459,7 @@
                 </a:solidFill>
                 <a:latin typeface="Times New Roman"/>
               </a:rPr>
-              <a:t>no link with later in-hospital death (AUROC 0.49); women alerted more at equal signs, but groups are 5 to 19 people.</a:t>
+              <a:t>no link with later in-hospital death (AUROC 0.51); women alerted more at equal signs, but groups are 5 to 19 people.</a:t>
             </a:r>
           </a:p>
         </p:txBody>
@@ -9917,7 +9923,7 @@
                 </a:solidFill>
                 <a:latin typeface="Times New Roman"/>
               </a:rPr>
-              <a:t>Overview: all 400 patients</a:t>
+              <a:t>Overview: all 420 patients</a:t>
             </a:r>
           </a:p>
         </p:txBody>
@@ -11941,7 +11947,7 @@
                           </a:solidFill>
                           <a:latin typeface="Times New Roman"/>
                         </a:rPr>
-                        <a:t>Low</a:t>
+                        <a:t>Low, about 0.3%</a:t>
                       </a:r>
                       <a:r>
                         <a:rPr sz="1200" b="0" i="0">
@@ -11950,7 +11956,7 @@
                           </a:solidFill>
                           <a:latin typeface="Times New Roman"/>
                         </a:rPr>
-                        <a:t>, about 0.4%</a:t>
+                        <a:t/>
                       </a:r>
                     </a:p>
                   </a:txBody>
@@ -11995,7 +12001,7 @@
                           </a:solidFill>
                           <a:latin typeface="Times New Roman"/>
                         </a:rPr>
-                        <a:t>Faster breathing, lower oxygen, more puffs</a:t>
+                        <a:t>Breathing 16→22, oxygen 95→91%, puffs 1→4</a:t>
                       </a:r>
                     </a:p>
                   </a:txBody>
@@ -12038,7 +12044,7 @@
                           </a:solidFill>
                           <a:latin typeface="Times New Roman"/>
                         </a:rPr>
-                        <a:t>High</a:t>
+                        <a:t>High, about 99%</a:t>
                       </a:r>
                       <a:r>
                         <a:rPr sz="1200" b="0" i="0">
@@ -12047,7 +12053,7 @@
                           </a:solidFill>
                           <a:latin typeface="Times New Roman"/>
                         </a:rPr>
-                        <a:t>, about 96%</a:t>
+                        <a:t/>
                       </a:r>
                     </a:p>
                   </a:txBody>
@@ -12135,7 +12141,7 @@
                           </a:solidFill>
                           <a:latin typeface="Times New Roman"/>
                         </a:rPr>
-                        <a:t>Risk 0.43% → </a:t>
+                        <a:t>Risk 0.26% → 0.33%</a:t>
                       </a:r>
                       <a:r>
                         <a:rPr sz="1200" b="1" i="0">
@@ -12144,7 +12150,7 @@
                           </a:solidFill>
                           <a:latin typeface="Times New Roman"/>
                         </a:rPr>
-                        <a:t>0.80%</a:t>
+                        <a:t/>
                       </a:r>
                     </a:p>
                   </a:txBody>
@@ -14106,7 +14112,7 @@
                 </a:solidFill>
                 <a:latin typeface="Times New Roman"/>
               </a:rPr>
-              <a:t>ages 30 to 92</a:t>
+              <a:t>ages 22 to 92</a:t>
             </a:r>
             <a:r>
               <a:rPr sz="1250" b="0" i="0">
@@ -22849,7 +22855,7 @@
                 </a:solidFill>
                 <a:latin typeface="Times New Roman"/>
               </a:rPr>
-              <a:t>400 synthetic patients: Synthea + India overlay</a:t>
+              <a:t>420 synthetic patients: Synthea + India overlay</a:t>
             </a:r>
           </a:p>
         </p:txBody>
@@ -26241,7 +26247,7 @@
                 </a:solidFill>
                 <a:latin typeface="Times New Roman"/>
               </a:rPr>
-              <a:t>Our Patient Cohort (400)</a:t>
+              <a:t>Our Patient Cohort (420)</a:t>
             </a:r>
           </a:p>
         </p:txBody>
@@ -26308,7 +26314,7 @@
                 </a:solidFill>
                 <a:latin typeface="Times New Roman"/>
               </a:rPr>
-              <a:t>17% / 42% / 29% / 12%</a:t>
+              <a:t>18% / 43% / 28% / 11%</a:t>
             </a:r>
           </a:p>
           <a:p>
@@ -26325,7 +26331,7 @@
                 </a:solidFill>
                 <a:latin typeface="Times New Roman"/>
               </a:rPr>
-              <a:t>Current smokers </a:t>
+              <a:t>Current smokers 19% · cooking smoke at home 32% · 8 cities</a:t>
             </a:r>
             <a:r>
               <a:rPr sz="1150" b="1" i="0">
@@ -26334,7 +26340,7 @@
                 </a:solidFill>
                 <a:latin typeface="Times New Roman"/>
               </a:rPr>
-              <a:t>18%</a:t>
+              <a:t/>
             </a:r>
             <a:r>
               <a:rPr sz="1150" b="0" i="0">
@@ -26343,7 +26349,7 @@
                 </a:solidFill>
                 <a:latin typeface="Times New Roman"/>
               </a:rPr>
-              <a:t> · cooking smoke at home </a:t>
+              <a:t/>
             </a:r>
             <a:r>
               <a:rPr sz="1150" b="1" i="0">
@@ -26352,7 +26358,7 @@
                 </a:solidFill>
                 <a:latin typeface="Times New Roman"/>
               </a:rPr>
-              <a:t>31%</a:t>
+              <a:t/>
             </a:r>
             <a:r>
               <a:rPr sz="1150" b="0" i="0">
@@ -26361,7 +26367,7 @@
                 </a:solidFill>
                 <a:latin typeface="Times New Roman"/>
               </a:rPr>
-              <a:t> · 8 cities</a:t>
+              <a:t/>
             </a:r>
           </a:p>
         </p:txBody>
@@ -27476,7 +27482,7 @@
                           </a:solidFill>
                           <a:latin typeface="Times New Roman"/>
                         </a:rPr>
-                        <a:t>400 patients (Synthea + India overlay)</a:t>
+                        <a:t>420 patients (Synthea + India overlay, 20 under 30)</a:t>
                       </a:r>
                     </a:p>
                   </a:txBody>
@@ -27650,7 +27656,7 @@
                           </a:solidFill>
                           <a:latin typeface="Times New Roman"/>
                         </a:rPr>
-                        <a:t>146,400 patient-days, from studies</a:t>
+                        <a:t>153,720 patient-days, from studies</a:t>
                       </a:r>
                     </a:p>
                   </a:txBody>
@@ -27824,7 +27830,7 @@
                           </a:solidFill>
                           <a:latin typeface="Times New Roman"/>
                         </a:rPr>
-                        <a:t>473 simulated events</a:t>
+                        <a:t>454 simulated events</a:t>
                       </a:r>
                     </a:p>
                   </a:txBody>
@@ -29939,7 +29945,7 @@
                           </a:solidFill>
                           <a:latin typeface="Times New Roman"/>
                         </a:rPr>
-                        <a:t>120 patients never seen in training (280 trained)</a:t>
+                        <a:t>126 patients never seen in training (294 trained)</a:t>
                       </a:r>
                     </a:p>
                   </a:txBody>
